--- a/综合实训答辩ppt.pptx
+++ b/综合实训答辩ppt.pptx
@@ -18357,7 +18357,7 @@
                   <a:schemeClr val="dk1"/>
                 </a:solidFill>
               </a:rPr>
-              <a:t>助教：林一熙、江婷</a:t>
+              <a:t>组长：颜佳熙</a:t>
             </a:r>
             <a:endParaRPr lang="zh-CN" altLang="en-US" sz="1800">
               <a:solidFill>
@@ -18386,35 +18386,6 @@
                   <a:schemeClr val="dk1"/>
                 </a:solidFill>
               </a:rPr>
-              <a:t>组长：颜佳熙</a:t>
-            </a:r>
-            <a:endParaRPr lang="zh-CN" altLang="en-US" sz="1800">
-              <a:solidFill>
-                <a:schemeClr val="dk1"/>
-              </a:solidFill>
-            </a:endParaRPr>
-          </a:p>
-          <a:p>
-            <a:pPr marL="285750" lvl="0" indent="-285750" algn="l" fontAlgn="ctr">
-              <a:lnSpc>
-                <a:spcPct val="130000"/>
-              </a:lnSpc>
-              <a:spcBef>
-                <a:spcPts val="1000"/>
-              </a:spcBef>
-              <a:spcAft>
-                <a:spcPts val="0"/>
-              </a:spcAft>
-              <a:buSzPct val="100000"/>
-              <a:buFont typeface="Wingdings" panose="05000000000000000000" charset="0"/>
-              <a:buChar char="l"/>
-            </a:pPr>
-            <a:r>
-              <a:rPr lang="zh-CN" altLang="en-US" sz="1800">
-                <a:solidFill>
-                  <a:schemeClr val="dk1"/>
-                </a:solidFill>
-              </a:rPr>
               <a:t>组员：余飞、陈圻、周毅、周玮康、许梓希</a:t>
             </a:r>
             <a:endParaRPr lang="zh-CN" altLang="en-US" sz="1800">
@@ -18469,15 +18440,7 @@
                   <a:schemeClr val="accent1"/>
                 </a:solidFill>
               </a:rPr>
-              <a:t>中级实训项目总结：</a:t>
-            </a:r>
-            <a:r>
-              <a:rPr lang="zh-CN" altLang="en-US" sz="5400" b="1" dirty="0">
-                <a:solidFill>
-                  <a:schemeClr val="accent1"/>
-                </a:solidFill>
-              </a:rPr>
-              <a:t>嘉递</a:t>
+              <a:t>综合实训项目总结：</a:t>
             </a:r>
             <a:br>
               <a:rPr lang="zh-CN" altLang="en-US" sz="5400" b="1" dirty="0">
@@ -18492,7 +18455,7 @@
                   <a:schemeClr val="accent1"/>
                 </a:solidFill>
               </a:rPr>
-              <a:t>中珠校园外卖平台</a:t>
+              <a:t>中珠校园外卖优化系统</a:t>
             </a:r>
             <a:endParaRPr lang="zh-CN" altLang="en-US" sz="5400" dirty="0">
               <a:solidFill>
@@ -19767,6 +19730,83 @@
           </a:prstGeom>
         </p:spPr>
       </p:pic>
+      <p:sp>
+        <p:nvSpPr>
+          <p:cNvPr id="5" name="文本框 4"/>
+          <p:cNvSpPr txBox="1"/>
+          <p:nvPr/>
+        </p:nvSpPr>
+        <p:spPr>
+          <a:xfrm>
+            <a:off x="493395" y="4504690"/>
+            <a:ext cx="6970395" cy="645160"/>
+          </a:xfrm>
+          <a:prstGeom prst="rect">
+            <a:avLst/>
+          </a:prstGeom>
+          <a:noFill/>
+        </p:spPr>
+        <p:txBody>
+          <a:bodyPr wrap="square" rtlCol="0">
+            <a:spAutoFit/>
+          </a:bodyPr>
+          <a:p>
+            <a:r>
+              <a:rPr lang="zh-CN" altLang="en-US"/>
+              <a:t>技术栈：</a:t>
+            </a:r>
+            <a:r>
+              <a:rPr lang="en-US" altLang="zh-CN"/>
+              <a:t>Vue 3 </a:t>
+            </a:r>
+            <a:r>
+              <a:rPr lang="zh-CN" altLang="en-US"/>
+              <a:t>前端</a:t>
+            </a:r>
+            <a:r>
+              <a:rPr lang="en-US" altLang="zh-CN"/>
+              <a:t> + FastAPI </a:t>
+            </a:r>
+            <a:r>
+              <a:rPr lang="zh-CN" altLang="en-US"/>
+              <a:t>后端</a:t>
+            </a:r>
+            <a:r>
+              <a:rPr lang="en-US" altLang="zh-CN"/>
+              <a:t> + </a:t>
+            </a:r>
+            <a:r>
+              <a:rPr lang="zh-CN" altLang="en-US"/>
+              <a:t>自研</a:t>
+            </a:r>
+            <a:r>
+              <a:rPr lang="en-US" altLang="zh-CN"/>
+              <a:t> ReAct Agent </a:t>
+            </a:r>
+            <a:r>
+              <a:rPr lang="zh-CN" altLang="en-US"/>
+              <a:t>引擎</a:t>
+            </a:r>
+            <a:r>
+              <a:rPr lang="en-US" altLang="zh-CN"/>
+              <a:t> + PostgreSQL/Redis/RabbitMQ </a:t>
+            </a:r>
+            <a:r>
+              <a:rPr lang="zh-CN" altLang="en-US"/>
+              <a:t>三件套</a:t>
+            </a:r>
+            <a:r>
+              <a:rPr lang="en-US" altLang="zh-CN"/>
+              <a:t> + Docker Compose </a:t>
+            </a:r>
+            <a:r>
+              <a:rPr lang="zh-CN" altLang="en-US"/>
+              <a:t>部署</a:t>
+            </a:r>
+            <a:endParaRPr lang="zh-CN" altLang="en-US"/>
+          </a:p>
+        </p:txBody>
+      </p:sp>
     </p:spTree>
     <p:custDataLst>
       <p:tags r:id="rId11"/>
